--- a/src/Tests.ImageSharp/Samples.VerifyPresentationDocument.verified.pptx
+++ b/src/Tests.ImageSharp/Samples.VerifyPresentationDocument.verified.pptx
@@ -2,10 +2,10 @@
 <file path=ppt/presentation.xml><?xml version="1.0" encoding="utf-8"?>
 <p:presentation xmlns:p="http://schemas.openxmlformats.org/presentationml/2006/main">
   <p:sldMasterIdLst>
-    <p:sldMasterId xmlns:r="http://schemas.openxmlformats.org/officeDocument/2006/relationships" id="2147483648" r:id="smRid1"/>
+    <p:sldMasterId xmlns:r="http://schemas.openxmlformats.org/officeDocument/2006/relationships" id="2147483648" r:id="DeterministicId2"/>
   </p:sldMasterIdLst>
   <p:sldIdLst>
-    <p:sldId xmlns:r="http://schemas.openxmlformats.org/officeDocument/2006/relationships" id="256" r:id="sldRid1"/>
+    <p:sldId xmlns:r="http://schemas.openxmlformats.org/officeDocument/2006/relationships" id="256" r:id="DeterministicId1"/>
   </p:sldIdLst>
   <p:sldSz cx="9144000" cy="6858000"/>
   <p:notesSz cx="6858000" cy="9144000"/>
@@ -53,7 +53,7 @@
   </p:cSld>
   <p:clrMap bg1="lt1" tx1="dk1" bg2="lt2" tx2="dk2" accent1="accent1" accent2="accent2" accent3="accent3" accent4="accent4" accent5="accent5" accent6="accent6" hlink="hlink" folHlink="folHlink"/>
   <p:sldLayoutIdLst>
-    <p:sldLayoutId xmlns:r="http://schemas.openxmlformats.org/officeDocument/2006/relationships" id="2147483649" r:id="slRid1"/>
+    <p:sldLayoutId xmlns:r="http://schemas.openxmlformats.org/officeDocument/2006/relationships" id="2147483649" r:id="DeterministicId1"/>
   </p:sldLayoutIdLst>
 </p:sldMaster>
 </file>

--- a/src/Tests.ImageSharp/Samples.VerifyPresentationDocument.verified.pptx
+++ b/src/Tests.ImageSharp/Samples.VerifyPresentationDocument.verified.pptx
@@ -37,7 +37,7 @@
   <p:cSld>
     <p:bg>
       <p:bgRef idx="1001">
-        <a:schemeClr xmlns:a="http://schemas.openxmlformats.org/drawingml/2006/main" val="phClr"/>
+        <a:schemeClr xmlns:a="http://schemas.openxmlformats.org/drawingml/2006/main" val="bg1"/>
       </p:bgRef>
     </p:bg>
     <p:spTree>
@@ -199,7 +199,12 @@
             <p:ph type="ctrTitle"/>
           </p:nvPr>
         </p:nvSpPr>
-        <p:spPr/>
+        <p:spPr>
+          <a:xfrm xmlns:a="http://schemas.openxmlformats.org/drawingml/2006/main">
+            <a:off x="838200" y="1825625"/>
+            <a:ext cx="7772400" cy="1470025"/>
+          </a:xfrm>
+        </p:spPr>
         <p:txBody>
           <a:bodyPr xmlns:a="http://schemas.openxmlformats.org/drawingml/2006/main"/>
           <a:lstStyle xmlns:a="http://schemas.openxmlformats.org/drawingml/2006/main"/>

--- a/src/Tests.ImageSharp/Samples.VerifyPresentationDocument.verified.pptx
+++ b/src/Tests.ImageSharp/Samples.VerifyPresentationDocument.verified.pptx
@@ -101,12 +101,12 @@
     </a:clrScheme>
     <a:fontScheme name="Office">
       <a:majorFont>
-        <a:latin typeface="Calibri"/>
+        <a:latin typeface="Aptos"/>
         <a:ea typeface=""/>
         <a:cs typeface=""/>
       </a:majorFont>
       <a:minorFont>
-        <a:latin typeface="Calibri"/>
+        <a:latin typeface="Aptos"/>
         <a:ea typeface=""/>
         <a:cs typeface=""/>
       </a:minorFont>
